--- a/SLE_LSP_Vivekananda.pptx
+++ b/SLE_LSP_Vivekananda.pptx
@@ -2485,7 +2485,7 @@
                 <a:ea typeface="Arial" pitchFamily="34" charset="-122"/>
                 <a:cs typeface="Arial" pitchFamily="34" charset="-120"/>
               </a:rPr>
-              <a:t>The assignment — and what I claimed</a:t>
+              <a:t>The assignment — and why BIPL</a:t>
             </a:r>
             <a:endParaRPr lang="en-US" sz="3000" dirty="0"/>
           </a:p>
@@ -2580,8 +2580,8 @@
         </p:nvSpPr>
         <p:spPr>
           <a:xfrm>
-            <a:off x="713232" y="2697480"/>
-            <a:ext cx="0" cy="1051560"/>
+            <a:off x="713232" y="2743200"/>
+            <a:ext cx="0" cy="1417320"/>
           </a:xfrm>
           <a:prstGeom prst="line">
             <a:avLst/>
@@ -2589,7 +2589,7 @@
           <a:noFill/>
           <a:ln w="31750">
             <a:solidFill>
-              <a:srgbClr val="E5B567"/>
+              <a:srgbClr val="4EC9B0"/>
             </a:solidFill>
             <a:prstDash val="solid"/>
           </a:ln>
@@ -2603,8 +2603,8 @@
         </p:nvSpPr>
         <p:spPr>
           <a:xfrm>
-            <a:off x="914400" y="2697480"/>
-            <a:ext cx="4846320" cy="1097280"/>
+            <a:off x="914400" y="2743200"/>
+            <a:ext cx="4892040" cy="1554480"/>
           </a:xfrm>
           <a:prstGeom prst="rect">
             <a:avLst/>
@@ -2618,148 +2618,46 @@
           <a:p>
             <a:pPr indent="0" marL="0">
               <a:lnSpc>
-                <a:spcPct val="115000"/>
+                <a:spcPct val="120000"/>
               </a:lnSpc>
               <a:buNone/>
             </a:pPr>
             <a:r>
-              <a:rPr lang="en-US" sz="1250" dirty="0">
-                <a:solidFill>
-                  <a:srgbClr val="8A94A3"/>
+              <a:rPr lang="en-US" sz="2300" b="1" dirty="0">
+                <a:solidFill>
+                  <a:srgbClr val="ECEFF3"/>
                 </a:solidFill>
                 <a:latin typeface="Arial" pitchFamily="34" charset="0"/>
                 <a:ea typeface="Arial" pitchFamily="34" charset="-122"/>
                 <a:cs typeface="Arial" pitchFamily="34" charset="-120"/>
               </a:rPr>
-              <a:t>The bar the assignment sets
+              <a:t>I chose BIPL
 </a:t>
             </a:r>
             <a:pPr indent="0" marL="0">
               <a:lnSpc>
-                <a:spcPct val="115000"/>
+                <a:spcPct val="120000"/>
               </a:lnSpc>
               <a:buNone/>
             </a:pPr>
             <a:r>
-              <a:rPr lang="en-US" sz="1800" dirty="0">
-                <a:solidFill>
-                  <a:srgbClr val="ECEFF3"/>
+              <a:rPr lang="en-US" sz="1500" dirty="0">
+                <a:solidFill>
+                  <a:srgbClr val="8A94A3"/>
                 </a:solidFill>
                 <a:latin typeface="Arial" pitchFamily="34" charset="0"/>
                 <a:ea typeface="Arial" pitchFamily="34" charset="-122"/>
                 <a:cs typeface="Arial" pitchFamily="34" charset="-120"/>
               </a:rPr>
-              <a:t>“We need to see an </a:t>
-            </a:r>
-            <a:pPr indent="0" marL="0">
-              <a:lnSpc>
-                <a:spcPct val="115000"/>
-              </a:lnSpc>
-              <a:buNone/>
-            </a:pPr>
-            <a:r>
-              <a:rPr lang="en-US" sz="1800" b="1" i="1" dirty="0">
-                <a:solidFill>
-                  <a:srgbClr val="E5B567"/>
-                </a:solidFill>
-                <a:latin typeface="Arial" pitchFamily="34" charset="0"/>
-                <a:ea typeface="Arial" pitchFamily="34" charset="-122"/>
-                <a:cs typeface="Arial" pitchFamily="34" charset="-120"/>
-              </a:rPr>
-              <a:t>interesting</a:t>
-            </a:r>
-            <a:pPr indent="0" marL="0">
-              <a:lnSpc>
-                <a:spcPct val="115000"/>
-              </a:lnSpc>
-              <a:buNone/>
-            </a:pPr>
-            <a:r>
-              <a:rPr lang="en-US" sz="1800" dirty="0">
-                <a:solidFill>
-                  <a:srgbClr val="ECEFF3"/>
-                </a:solidFill>
-                <a:latin typeface="Arial" pitchFamily="34" charset="0"/>
-                <a:ea typeface="Arial" pitchFamily="34" charset="-122"/>
-                <a:cs typeface="Arial" pitchFamily="34" charset="-120"/>
-              </a:rPr>
-              <a:t> LSP server and client.”</a:t>
-            </a:r>
-            <a:pPr indent="0" marL="0">
-              <a:lnSpc>
-                <a:spcPct val="115000"/>
-              </a:lnSpc>
-              <a:buNone/>
-            </a:pPr>
-            <a:endParaRPr lang="en-US" sz="1800" dirty="0"/>
-          </a:p>
-          <a:p>
-            <a:pPr indent="0" marL="0">
-              <a:lnSpc>
-                <a:spcPct val="115000"/>
-              </a:lnSpc>
-              <a:buNone/>
-            </a:pPr>
-            <a:r>
-              <a:rPr lang="en-US" sz="1200" dirty="0">
-                <a:solidFill>
-                  <a:srgbClr val="5A6472"/>
-                </a:solidFill>
-                <a:latin typeface="Arial" pitchFamily="34" charset="0"/>
-                <a:ea typeface="Arial" pitchFamily="34" charset="-122"/>
-                <a:cs typeface="Arial" pitchFamily="34" charset="-120"/>
-              </a:rPr>
-              <a:t>— R. Lämmel, assignment post</a:t>
-            </a:r>
-            <a:endParaRPr lang="en-US" sz="1800" dirty="0"/>
-          </a:p>
-        </p:txBody>
-      </p:sp>
-      <p:sp>
-        <p:nvSpPr>
-          <p:cNvPr id="7" name="Text 5"/>
-          <p:cNvSpPr/>
-          <p:nvPr/>
-        </p:nvSpPr>
-        <p:spPr>
-          <a:xfrm>
-            <a:off x="685800" y="4160520"/>
-            <a:ext cx="5120640" cy="822960"/>
-          </a:xfrm>
-          <a:prstGeom prst="rect">
-            <a:avLst/>
-          </a:prstGeom>
-          <a:noFill/>
-          <a:ln/>
-        </p:spPr>
-        <p:txBody>
-          <a:bodyPr wrap="square" lIns="0" tIns="0" rIns="0" bIns="0" rtlCol="0" anchor="ctr"/>
-          <a:lstStyle/>
-          <a:p>
-            <a:pPr indent="0" marL="0">
-              <a:lnSpc>
-                <a:spcPct val="120000"/>
-              </a:lnSpc>
-              <a:buNone/>
-            </a:pPr>
-            <a:r>
-              <a:rPr lang="en-US" sz="1500" i="1" dirty="0">
-                <a:solidFill>
-                  <a:srgbClr val="8A94A3"/>
-                </a:solidFill>
-                <a:latin typeface="Arial" pitchFamily="34" charset="0"/>
-                <a:ea typeface="Arial" pitchFamily="34" charset="-122"/>
-                <a:cs typeface="Arial" pitchFamily="34" charset="-120"/>
-              </a:rPr>
-              <a:t>So the whole game is: pick a language where the analysis is genuinely non-trivial.</a:t>
-            </a:r>
-            <a:endParaRPr lang="en-US" sz="1500" dirty="0"/>
-          </a:p>
-        </p:txBody>
-      </p:sp>
-      <p:sp>
-        <p:nvSpPr>
-          <p:cNvPr id="8" name="Shape 6"/>
+              <a:t>a small imperative language — a fragment of C. Assignment, if, while, and integer / boolean expressions. No declarations, no input/output.</a:t>
+            </a:r>
+            <a:endParaRPr lang="en-US" sz="2300" dirty="0"/>
+          </a:p>
+        </p:txBody>
+      </p:sp>
+      <p:sp>
+        <p:nvSpPr>
+          <p:cNvPr id="7" name="Shape 5"/>
           <p:cNvSpPr/>
           <p:nvPr/>
         </p:nvSpPr>
@@ -2786,7 +2684,7 @@
       </p:sp>
       <p:sp>
         <p:nvSpPr>
-          <p:cNvPr id="9" name="Text 7"/>
+          <p:cNvPr id="8" name="Text 6"/>
           <p:cNvSpPr/>
           <p:nvPr/>
         </p:nvSpPr>
@@ -2817,7 +2715,7 @@
                 <a:ea typeface="Arial" pitchFamily="34" charset="-122"/>
                 <a:cs typeface="Arial" pitchFamily="34" charset="-120"/>
               </a:rPr>
-              <a:t>MY CLAIM  ·  OLAT, 23 Jun</a:t>
+              <a:t>SMALL — BUT WORTH TOOLING</a:t>
             </a:r>
             <a:endParaRPr lang="en-US" sz="1150" dirty="0"/>
           </a:p>
@@ -2825,7 +2723,7 @@
       </p:sp>
       <p:sp>
         <p:nvSpPr>
-          <p:cNvPr id="10" name="Text 8"/>
+          <p:cNvPr id="9" name="Text 7"/>
           <p:cNvSpPr/>
           <p:nvPr/>
         </p:nvSpPr>
@@ -2851,6 +2749,23 @@
               <a:buNone/>
             </a:pPr>
             <a:r>
+              <a:rPr lang="en-US" sz="1550" b="1" dirty="0">
+                <a:solidFill>
+                  <a:srgbClr val="4EC9B0"/>
+                </a:solidFill>
+                <a:latin typeface="Courier New" pitchFamily="34" charset="0"/>
+                <a:ea typeface="Courier New" pitchFamily="34" charset="-122"/>
+                <a:cs typeface="Courier New" pitchFamily="34" charset="-120"/>
+              </a:rPr>
+              <a:t>BIPL</a:t>
+            </a:r>
+            <a:pPr indent="0" marL="0">
+              <a:lnSpc>
+                <a:spcPct val="115000"/>
+              </a:lnSpc>
+              <a:buNone/>
+            </a:pPr>
+            <a:r>
               <a:rPr lang="en-US" sz="1550" dirty="0">
                 <a:solidFill>
                   <a:srgbClr val="D7DBE0"/>
@@ -2859,8 +2774,179 @@
                 <a:ea typeface="Arial" pitchFamily="34" charset="-122"/>
                 <a:cs typeface="Arial" pitchFamily="34" charset="-120"/>
               </a:rPr>
-              <a:t>I chose </a:t>
-            </a:r>
+              <a:t> has real static semantics behind its five statements:</a:t>
+            </a:r>
+            <a:endParaRPr lang="en-US" sz="1550" dirty="0"/>
+          </a:p>
+        </p:txBody>
+      </p:sp>
+      <p:sp>
+        <p:nvSpPr>
+          <p:cNvPr id="10" name="Shape 8"/>
+          <p:cNvSpPr/>
+          <p:nvPr/>
+        </p:nvSpPr>
+        <p:spPr>
+          <a:xfrm>
+            <a:off x="6743700" y="2674620"/>
+            <a:ext cx="82296" cy="82296"/>
+          </a:xfrm>
+          <a:prstGeom prst="ellipse">
+            <a:avLst/>
+          </a:prstGeom>
+          <a:solidFill>
+            <a:srgbClr val="4EC9B0"/>
+          </a:solidFill>
+          <a:ln/>
+        </p:spPr>
+      </p:sp>
+      <p:sp>
+        <p:nvSpPr>
+          <p:cNvPr id="11" name="Text 9"/>
+          <p:cNvSpPr/>
+          <p:nvPr/>
+        </p:nvSpPr>
+        <p:spPr>
+          <a:xfrm>
+            <a:off x="6949440" y="2606040"/>
+            <a:ext cx="4480560" cy="457200"/>
+          </a:xfrm>
+          <a:prstGeom prst="rect">
+            <a:avLst/>
+          </a:prstGeom>
+          <a:noFill/>
+          <a:ln/>
+        </p:spPr>
+        <p:txBody>
+          <a:bodyPr wrap="square" lIns="0" tIns="0" rIns="0" bIns="0" rtlCol="0" anchor="t"/>
+          <a:lstStyle/>
+          <a:p>
+            <a:pPr indent="0" marL="0">
+              <a:buNone/>
+            </a:pPr>
+            <a:r>
+              <a:rPr lang="en-US" sz="1350" b="1" dirty="0">
+                <a:solidFill>
+                  <a:srgbClr val="ECEFF3"/>
+                </a:solidFill>
+                <a:latin typeface="Arial" pitchFamily="34" charset="0"/>
+                <a:ea typeface="Arial" pitchFamily="34" charset="-122"/>
+                <a:cs typeface="Arial" pitchFamily="34" charset="-120"/>
+              </a:rPr>
+              <a:t>type consistency  </a:t>
+            </a:r>
+            <a:pPr indent="0" marL="0">
+              <a:buNone/>
+            </a:pPr>
+            <a:r>
+              <a:rPr lang="en-US" sz="1350" dirty="0">
+                <a:solidFill>
+                  <a:srgbClr val="8A94A3"/>
+                </a:solidFill>
+                <a:latin typeface="Arial" pitchFamily="34" charset="0"/>
+                <a:ea typeface="Arial" pitchFamily="34" charset="-122"/>
+                <a:cs typeface="Arial" pitchFamily="34" charset="-120"/>
+              </a:rPr>
+              <a:t>— arithmetic vs. boolean; conditions must be boolean</a:t>
+            </a:r>
+            <a:endParaRPr lang="en-US" sz="1350" dirty="0"/>
+          </a:p>
+        </p:txBody>
+      </p:sp>
+      <p:sp>
+        <p:nvSpPr>
+          <p:cNvPr id="12" name="Shape 10"/>
+          <p:cNvSpPr/>
+          <p:nvPr/>
+        </p:nvSpPr>
+        <p:spPr>
+          <a:xfrm>
+            <a:off x="6743700" y="3223260"/>
+            <a:ext cx="82296" cy="82296"/>
+          </a:xfrm>
+          <a:prstGeom prst="ellipse">
+            <a:avLst/>
+          </a:prstGeom>
+          <a:solidFill>
+            <a:srgbClr val="4EC9B0"/>
+          </a:solidFill>
+          <a:ln/>
+        </p:spPr>
+      </p:sp>
+      <p:sp>
+        <p:nvSpPr>
+          <p:cNvPr id="13" name="Text 11"/>
+          <p:cNvSpPr/>
+          <p:nvPr/>
+        </p:nvSpPr>
+        <p:spPr>
+          <a:xfrm>
+            <a:off x="6949440" y="3154680"/>
+            <a:ext cx="4480560" cy="457200"/>
+          </a:xfrm>
+          <a:prstGeom prst="rect">
+            <a:avLst/>
+          </a:prstGeom>
+          <a:noFill/>
+          <a:ln/>
+        </p:spPr>
+        <p:txBody>
+          <a:bodyPr wrap="square" lIns="0" tIns="0" rIns="0" bIns="0" rtlCol="0" anchor="t"/>
+          <a:lstStyle/>
+          <a:p>
+            <a:pPr indent="0" marL="0">
+              <a:buNone/>
+            </a:pPr>
+            <a:r>
+              <a:rPr lang="en-US" sz="1350" b="1" dirty="0">
+                <a:solidFill>
+                  <a:srgbClr val="ECEFF3"/>
+                </a:solidFill>
+                <a:latin typeface="Arial" pitchFamily="34" charset="0"/>
+                <a:ea typeface="Arial" pitchFamily="34" charset="-122"/>
+                <a:cs typeface="Arial" pitchFamily="34" charset="-120"/>
+              </a:rPr>
+              <a:t>definite assignment  </a:t>
+            </a:r>
+            <a:pPr indent="0" marL="0">
+              <a:buNone/>
+            </a:pPr>
+            <a:r>
+              <a:rPr lang="en-US" sz="1350" dirty="0">
+                <a:solidFill>
+                  <a:srgbClr val="8A94A3"/>
+                </a:solidFill>
+                <a:latin typeface="Arial" pitchFamily="34" charset="0"/>
+                <a:ea typeface="Arial" pitchFamily="34" charset="-122"/>
+                <a:cs typeface="Arial" pitchFamily="34" charset="-120"/>
+              </a:rPr>
+              <a:t>— a variable shouldn't be read before it is assigned</a:t>
+            </a:r>
+            <a:endParaRPr lang="en-US" sz="1350" dirty="0"/>
+          </a:p>
+        </p:txBody>
+      </p:sp>
+      <p:sp>
+        <p:nvSpPr>
+          <p:cNvPr id="14" name="Text 12"/>
+          <p:cNvSpPr/>
+          <p:nvPr/>
+        </p:nvSpPr>
+        <p:spPr>
+          <a:xfrm>
+            <a:off x="6629400" y="3794760"/>
+            <a:ext cx="4709160" cy="548640"/>
+          </a:xfrm>
+          <a:prstGeom prst="rect">
+            <a:avLst/>
+          </a:prstGeom>
+          <a:noFill/>
+          <a:ln/>
+        </p:spPr>
+        <p:txBody>
+          <a:bodyPr wrap="square" lIns="0" tIns="0" rIns="0" bIns="0" rtlCol="0" anchor="ctr"/>
+          <a:lstStyle/>
+          <a:p>
             <a:pPr indent="0" marL="0">
               <a:lnSpc>
                 <a:spcPct val="115000"/>
@@ -2868,24 +2954,7 @@
               <a:buNone/>
             </a:pPr>
             <a:r>
-              <a:rPr lang="en-US" sz="1550" b="1" dirty="0">
-                <a:solidFill>
-                  <a:srgbClr val="4EC9B0"/>
-                </a:solidFill>
-                <a:latin typeface="Courier New" pitchFamily="34" charset="0"/>
-                <a:ea typeface="Courier New" pitchFamily="34" charset="-122"/>
-                <a:cs typeface="Courier New" pitchFamily="34" charset="-120"/>
-              </a:rPr>
-              <a:t>BIPL</a:t>
-            </a:r>
-            <a:pPr indent="0" marL="0">
-              <a:lnSpc>
-                <a:spcPct val="115000"/>
-              </a:lnSpc>
-              <a:buNone/>
-            </a:pPr>
-            <a:r>
-              <a:rPr lang="en-US" sz="1550" dirty="0">
+              <a:rPr lang="en-US" sz="1400" i="1" dirty="0">
                 <a:solidFill>
                   <a:srgbClr val="D7DBE0"/>
                 </a:solidFill>
@@ -2893,206 +2962,21 @@
                 <a:ea typeface="Arial" pitchFamily="34" charset="-122"/>
                 <a:cs typeface="Arial" pitchFamily="34" charset="-120"/>
               </a:rPr>
-              <a:t> — small, but with real static semantics worth tooling:</a:t>
-            </a:r>
-            <a:endParaRPr lang="en-US" sz="1550" dirty="0"/>
-          </a:p>
-        </p:txBody>
-      </p:sp>
-      <p:sp>
-        <p:nvSpPr>
-          <p:cNvPr id="11" name="Shape 9"/>
-          <p:cNvSpPr/>
-          <p:nvPr/>
-        </p:nvSpPr>
-        <p:spPr>
-          <a:xfrm>
-            <a:off x="6743700" y="2674620"/>
-            <a:ext cx="82296" cy="82296"/>
-          </a:xfrm>
-          <a:prstGeom prst="ellipse">
-            <a:avLst/>
-          </a:prstGeom>
-          <a:solidFill>
-            <a:srgbClr val="4EC9B0"/>
-          </a:solidFill>
-          <a:ln/>
-        </p:spPr>
-      </p:sp>
-      <p:sp>
-        <p:nvSpPr>
-          <p:cNvPr id="12" name="Text 10"/>
-          <p:cNvSpPr/>
-          <p:nvPr/>
-        </p:nvSpPr>
-        <p:spPr>
-          <a:xfrm>
-            <a:off x="6949440" y="2606040"/>
-            <a:ext cx="4480560" cy="457200"/>
-          </a:xfrm>
-          <a:prstGeom prst="rect">
-            <a:avLst/>
-          </a:prstGeom>
-          <a:noFill/>
-          <a:ln/>
-        </p:spPr>
-        <p:txBody>
-          <a:bodyPr wrap="square" lIns="0" tIns="0" rIns="0" bIns="0" rtlCol="0" anchor="t"/>
-          <a:lstStyle/>
-          <a:p>
-            <a:pPr indent="0" marL="0">
-              <a:buNone/>
-            </a:pPr>
-            <a:r>
-              <a:rPr lang="en-US" sz="1350" b="1" dirty="0">
-                <a:solidFill>
-                  <a:srgbClr val="ECEFF3"/>
-                </a:solidFill>
-                <a:latin typeface="Arial" pitchFamily="34" charset="0"/>
-                <a:ea typeface="Arial" pitchFamily="34" charset="-122"/>
-                <a:cs typeface="Arial" pitchFamily="34" charset="-120"/>
-              </a:rPr>
-              <a:t>type consistency  </a:t>
-            </a:r>
-            <a:pPr indent="0" marL="0">
-              <a:buNone/>
-            </a:pPr>
-            <a:r>
-              <a:rPr lang="en-US" sz="1350" dirty="0">
-                <a:solidFill>
-                  <a:srgbClr val="8A94A3"/>
-                </a:solidFill>
-                <a:latin typeface="Arial" pitchFamily="34" charset="0"/>
-                <a:ea typeface="Arial" pitchFamily="34" charset="-122"/>
-                <a:cs typeface="Arial" pitchFamily="34" charset="-120"/>
-              </a:rPr>
-              <a:t>— arithmetic vs. boolean; conditions must be boolean</a:t>
-            </a:r>
-            <a:endParaRPr lang="en-US" sz="1350" dirty="0"/>
-          </a:p>
-        </p:txBody>
-      </p:sp>
-      <p:sp>
-        <p:nvSpPr>
-          <p:cNvPr id="13" name="Shape 11"/>
-          <p:cNvSpPr/>
-          <p:nvPr/>
-        </p:nvSpPr>
-        <p:spPr>
-          <a:xfrm>
-            <a:off x="6743700" y="3223260"/>
-            <a:ext cx="82296" cy="82296"/>
-          </a:xfrm>
-          <a:prstGeom prst="ellipse">
-            <a:avLst/>
-          </a:prstGeom>
-          <a:solidFill>
-            <a:srgbClr val="4EC9B0"/>
-          </a:solidFill>
-          <a:ln/>
-        </p:spPr>
-      </p:sp>
-      <p:sp>
-        <p:nvSpPr>
-          <p:cNvPr id="14" name="Text 12"/>
-          <p:cNvSpPr/>
-          <p:nvPr/>
-        </p:nvSpPr>
-        <p:spPr>
-          <a:xfrm>
-            <a:off x="6949440" y="3154680"/>
-            <a:ext cx="4480560" cy="457200"/>
-          </a:xfrm>
-          <a:prstGeom prst="rect">
-            <a:avLst/>
-          </a:prstGeom>
-          <a:noFill/>
-          <a:ln/>
-        </p:spPr>
-        <p:txBody>
-          <a:bodyPr wrap="square" lIns="0" tIns="0" rIns="0" bIns="0" rtlCol="0" anchor="t"/>
-          <a:lstStyle/>
-          <a:p>
-            <a:pPr indent="0" marL="0">
-              <a:buNone/>
-            </a:pPr>
-            <a:r>
-              <a:rPr lang="en-US" sz="1350" b="1" dirty="0">
-                <a:solidFill>
-                  <a:srgbClr val="ECEFF3"/>
-                </a:solidFill>
-                <a:latin typeface="Arial" pitchFamily="34" charset="0"/>
-                <a:ea typeface="Arial" pitchFamily="34" charset="-122"/>
-                <a:cs typeface="Arial" pitchFamily="34" charset="-120"/>
-              </a:rPr>
-              <a:t>definite assignment  </a:t>
-            </a:r>
-            <a:pPr indent="0" marL="0">
-              <a:buNone/>
-            </a:pPr>
-            <a:r>
-              <a:rPr lang="en-US" sz="1350" dirty="0">
-                <a:solidFill>
-                  <a:srgbClr val="8A94A3"/>
-                </a:solidFill>
-                <a:latin typeface="Arial" pitchFamily="34" charset="0"/>
-                <a:ea typeface="Arial" pitchFamily="34" charset="-122"/>
-                <a:cs typeface="Arial" pitchFamily="34" charset="-120"/>
-              </a:rPr>
-              <a:t>— a variable shouldn't be read before it is assigned</a:t>
-            </a:r>
-            <a:endParaRPr lang="en-US" sz="1350" dirty="0"/>
-          </a:p>
-        </p:txBody>
-      </p:sp>
-      <p:sp>
-        <p:nvSpPr>
-          <p:cNvPr id="15" name="Text 13"/>
-          <p:cNvSpPr/>
-          <p:nvPr/>
-        </p:nvSpPr>
-        <p:spPr>
-          <a:xfrm>
-            <a:off x="6629400" y="3749040"/>
-            <a:ext cx="4709160" cy="365760"/>
-          </a:xfrm>
-          <a:prstGeom prst="rect">
-            <a:avLst/>
-          </a:prstGeom>
-          <a:noFill/>
-          <a:ln/>
-        </p:spPr>
-        <p:txBody>
-          <a:bodyPr wrap="square" lIns="0" tIns="0" rIns="0" bIns="0" rtlCol="0" anchor="ctr"/>
-          <a:lstStyle/>
-          <a:p>
-            <a:pPr indent="0" marL="0">
-              <a:buNone/>
-            </a:pPr>
-            <a:r>
-              <a:rPr lang="en-US" sz="1350" i="1" dirty="0">
-                <a:solidFill>
-                  <a:srgbClr val="D7DBE0"/>
-                </a:solidFill>
-                <a:latin typeface="Arial" pitchFamily="34" charset="0"/>
-                <a:ea typeface="Arial" pitchFamily="34" charset="-122"/>
-                <a:cs typeface="Arial" pitchFamily="34" charset="-120"/>
-              </a:rPr>
-              <a:t>“Diagnostics from an actual analysis — not keyword matching.”</a:t>
-            </a:r>
-            <a:endParaRPr lang="en-US" sz="1350" dirty="0"/>
-          </a:p>
-        </p:txBody>
-      </p:sp>
-      <p:sp>
-        <p:nvSpPr>
-          <p:cNvPr id="16" name="Shape 14"/>
-          <p:cNvSpPr/>
-          <p:nvPr/>
-        </p:nvSpPr>
-        <p:spPr>
-          <a:xfrm>
-            <a:off x="6629400" y="4224528"/>
+              <a:t>So the diagnostics come from an actual analysis — not from matching keywords.</a:t>
+            </a:r>
+            <a:endParaRPr lang="en-US" sz="1400" dirty="0"/>
+          </a:p>
+        </p:txBody>
+      </p:sp>
+      <p:sp>
+        <p:nvSpPr>
+          <p:cNvPr id="15" name="Shape 13"/>
+          <p:cNvSpPr/>
+          <p:nvPr/>
+        </p:nvSpPr>
+        <p:spPr>
+          <a:xfrm>
+            <a:off x="6629400" y="4480560"/>
             <a:ext cx="4663440" cy="0"/>
           </a:xfrm>
           <a:prstGeom prst="line">
@@ -3109,14 +2993,14 @@
       </p:sp>
       <p:sp>
         <p:nvSpPr>
-          <p:cNvPr id="17" name="Text 15"/>
-          <p:cNvSpPr/>
-          <p:nvPr/>
-        </p:nvSpPr>
-        <p:spPr>
-          <a:xfrm>
-            <a:off x="6629400" y="4370832"/>
-            <a:ext cx="4709160" cy="365760"/>
+          <p:cNvPr id="16" name="Text 14"/>
+          <p:cNvSpPr/>
+          <p:nvPr/>
+        </p:nvSpPr>
+        <p:spPr>
+          <a:xfrm>
+            <a:off x="6629400" y="4617720"/>
+            <a:ext cx="4709160" cy="320040"/>
           </a:xfrm>
           <a:prstGeom prst="rect">
             <a:avLst/>
@@ -3132,7 +3016,7 @@
               <a:buNone/>
             </a:pPr>
             <a:r>
-              <a:rPr lang="en-US" sz="1350" b="1" dirty="0">
+              <a:rPr lang="en-US" sz="1300" b="1" dirty="0">
                 <a:solidFill>
                   <a:srgbClr val="4EC9B0"/>
                 </a:solidFill>
@@ -3140,13 +3024,13 @@
                 <a:ea typeface="Arial" pitchFamily="34" charset="-122"/>
                 <a:cs typeface="Arial" pitchFamily="34" charset="-120"/>
               </a:rPr>
-              <a:t>✓ Confirmed  </a:t>
-            </a:r>
-            <a:pPr indent="0" marL="0">
-              <a:buNone/>
-            </a:pPr>
-            <a:r>
-              <a:rPr lang="en-US" sz="1350" dirty="0">
+              <a:t>✓  </a:t>
+            </a:r>
+            <a:pPr indent="0" marL="0">
+              <a:buNone/>
+            </a:pPr>
+            <a:r>
+              <a:rPr lang="en-US" sz="1300" dirty="0">
                 <a:solidFill>
                   <a:srgbClr val="8A94A3"/>
                 </a:solidFill>
@@ -3154,9 +3038,9 @@
                 <a:ea typeface="Arial" pitchFamily="34" charset="-122"/>
                 <a:cs typeface="Arial" pitchFamily="34" charset="-120"/>
               </a:rPr>
-              <a:t>“Yes, BIPL is a good choice.” — RL, 6 Jul</a:t>
-            </a:r>
-            <a:endParaRPr lang="en-US" sz="1350" dirty="0"/>
+              <a:t>Confirmed with the teaching staff.</a:t>
+            </a:r>
+            <a:endParaRPr lang="en-US" sz="1300" dirty="0"/>
           </a:p>
         </p:txBody>
       </p:sp>
@@ -9915,7 +9799,7 @@
                 <a:ea typeface="Arial" pitchFamily="34" charset="-122"/>
                 <a:cs typeface="Arial" pitchFamily="34" charset="-120"/>
               </a:rPr>
-              <a:t>Respecting the language's own semantics — instead of imposing a naive rule — is what makes the server “interesting.”</a:t>
+              <a:t>Telling a genuine bug apart from a legitimate input — that is the real work here.</a:t>
             </a:r>
             <a:endParaRPr lang="en-US" sz="1500" dirty="0"/>
           </a:p>

--- a/SLE_LSP_Vivekananda.pptx
+++ b/SLE_LSP_Vivekananda.pptx
@@ -4697,7 +4697,7 @@
                 <a:ea typeface="Arial" pitchFamily="34" charset="-122"/>
                 <a:cs typeface="Arial" pitchFamily="34" charset="-120"/>
               </a:rPr>
-              <a:t>The idea: why BIPL is interesting to tool</a:t>
+              <a:t>Three facts that drive everything</a:t>
             </a:r>
             <a:endParaRPr lang="en-US" sz="3000" dirty="0"/>
           </a:p>
@@ -5814,7 +5814,7 @@
                 <a:ea typeface="Arial" pitchFamily="34" charset="-122"/>
                 <a:cs typeface="Arial" pitchFamily="34" charset="-120"/>
               </a:rPr>
-              <a:t>Three facts make it interesting to tool</a:t>
+              <a:t>What BIPL leaves implicit</a:t>
             </a:r>
             <a:endParaRPr lang="en-US" sz="1800" dirty="0"/>
           </a:p>

--- a/SLE_LSP_Vivekananda.pptx
+++ b/SLE_LSP_Vivekananda.pptx
@@ -2414,7 +2414,7 @@
                 <a:ea typeface="Arial" pitchFamily="34" charset="-122"/>
                 <a:cs typeface="Arial" pitchFamily="34" charset="-120"/>
               </a:rPr>
-              <a:t>even five statements hide two real language problems.</a:t>
+              <a:t>even a tiny language hides two real problems worth tooling.</a:t>
             </a:r>
             <a:endParaRPr lang="en-US" sz="1900" dirty="0"/>
           </a:p>
@@ -2934,8 +2934,8 @@
         </p:nvSpPr>
         <p:spPr>
           <a:xfrm>
-            <a:off x="6629400" y="3794760"/>
-            <a:ext cx="4709160" cy="548640"/>
+            <a:off x="6629400" y="3977640"/>
+            <a:ext cx="4709160" cy="640080"/>
           </a:xfrm>
           <a:prstGeom prst="rect">
             <a:avLst/>
@@ -2949,12 +2949,12 @@
           <a:p>
             <a:pPr indent="0" marL="0">
               <a:lnSpc>
-                <a:spcPct val="115000"/>
+                <a:spcPct val="120000"/>
               </a:lnSpc>
               <a:buNone/>
             </a:pPr>
             <a:r>
-              <a:rPr lang="en-US" sz="1400" i="1" dirty="0">
+              <a:rPr lang="en-US" sz="1450" i="1" dirty="0">
                 <a:solidFill>
                   <a:srgbClr val="D7DBE0"/>
                 </a:solidFill>
@@ -2964,83 +2964,7 @@
               </a:rPr>
               <a:t>So the diagnostics come from an actual analysis — not from matching keywords.</a:t>
             </a:r>
-            <a:endParaRPr lang="en-US" sz="1400" dirty="0"/>
-          </a:p>
-        </p:txBody>
-      </p:sp>
-      <p:sp>
-        <p:nvSpPr>
-          <p:cNvPr id="15" name="Shape 13"/>
-          <p:cNvSpPr/>
-          <p:nvPr/>
-        </p:nvSpPr>
-        <p:spPr>
-          <a:xfrm>
-            <a:off x="6629400" y="4480560"/>
-            <a:ext cx="4663440" cy="0"/>
-          </a:xfrm>
-          <a:prstGeom prst="line">
-            <a:avLst/>
-          </a:prstGeom>
-          <a:noFill/>
-          <a:ln w="9525">
-            <a:solidFill>
-              <a:srgbClr val="2C333D"/>
-            </a:solidFill>
-            <a:prstDash val="solid"/>
-          </a:ln>
-        </p:spPr>
-      </p:sp>
-      <p:sp>
-        <p:nvSpPr>
-          <p:cNvPr id="16" name="Text 14"/>
-          <p:cNvSpPr/>
-          <p:nvPr/>
-        </p:nvSpPr>
-        <p:spPr>
-          <a:xfrm>
-            <a:off x="6629400" y="4617720"/>
-            <a:ext cx="4709160" cy="320040"/>
-          </a:xfrm>
-          <a:prstGeom prst="rect">
-            <a:avLst/>
-          </a:prstGeom>
-          <a:noFill/>
-          <a:ln/>
-        </p:spPr>
-        <p:txBody>
-          <a:bodyPr wrap="square" lIns="0" tIns="0" rIns="0" bIns="0" rtlCol="0" anchor="ctr"/>
-          <a:lstStyle/>
-          <a:p>
-            <a:pPr indent="0" marL="0">
-              <a:buNone/>
-            </a:pPr>
-            <a:r>
-              <a:rPr lang="en-US" sz="1300" b="1" dirty="0">
-                <a:solidFill>
-                  <a:srgbClr val="4EC9B0"/>
-                </a:solidFill>
-                <a:latin typeface="Arial" pitchFamily="34" charset="0"/>
-                <a:ea typeface="Arial" pitchFamily="34" charset="-122"/>
-                <a:cs typeface="Arial" pitchFamily="34" charset="-120"/>
-              </a:rPr>
-              <a:t>✓  </a:t>
-            </a:r>
-            <a:pPr indent="0" marL="0">
-              <a:buNone/>
-            </a:pPr>
-            <a:r>
-              <a:rPr lang="en-US" sz="1300" dirty="0">
-                <a:solidFill>
-                  <a:srgbClr val="8A94A3"/>
-                </a:solidFill>
-                <a:latin typeface="Arial" pitchFamily="34" charset="0"/>
-                <a:ea typeface="Arial" pitchFamily="34" charset="-122"/>
-                <a:cs typeface="Arial" pitchFamily="34" charset="-120"/>
-              </a:rPr>
-              <a:t>Confirmed with the teaching staff.</a:t>
-            </a:r>
-            <a:endParaRPr lang="en-US" sz="1300" dirty="0"/>
+            <a:endParaRPr lang="en-US" sz="1450" dirty="0"/>
           </a:p>
         </p:txBody>
       </p:sp>
